--- a/dist/초1/수학/수와연산/초1_수학_수와연산_09_10이되는더하기.pptx
+++ b/dist/초1/수학/수와연산/초1_수학_수와연산_09_10이되는더하기.pptx
@@ -120,13 +120,13 @@
   <p:extLst>
     <p:ext uri="{521415D9-36F7-43E2-AB2F-B90AF26B5E84}">
       <p14:sectionLst xmlns:p14="http://schemas.microsoft.com/office/powerpoint/2010/main">
-        <p14:section name="도입" id="{2f9613f9-8389-94e4-6d09-4812ae412c55}">
+        <p14:section name="도입" id="{2761c9e4-2c59-cf1a-38f5-bfadaa0ee4be}">
           <p14:sldIdLst>
             <p14:sldId id="256"/>
             <p14:sldId id="257"/>
           </p14:sldIdLst>
         </p14:section>
-        <p14:section name="개념" id="{9a1606ec-fd3c-2331-1142-b19700494797}">
+        <p14:section name="개념" id="{8c85f333-5d9a-4329-4b06-1c08d0c2e983}">
           <p14:sldIdLst>
             <p14:sldId id="258"/>
             <p14:sldId id="259"/>
@@ -134,32 +134,32 @@
             <p14:sldId id="262"/>
           </p14:sldIdLst>
         </p14:section>
-        <p14:section name="연습" id="{1223d8c9-6c74-d4de-b37b-b66877c6098d}">
+        <p14:section name="연습" id="{9c94ba77-4613-f226-d6d2-e052382352eb}">
           <p14:sldIdLst>
             <p14:sldId id="260"/>
             <p14:sldId id="263"/>
             <p14:sldId id="264"/>
           </p14:sldIdLst>
         </p14:section>
-        <p14:section name="개념" id="{d41f0bfe-88bc-14f5-6de9-b4ff4f240116}">
+        <p14:section name="개념" id="{93b31e87-ecba-516c-a30f-74ea19be79ee}">
           <p14:sldIdLst/>
         </p14:section>
-        <p14:section name="연습" id="{6aa23e85-6887-810a-f05f-9c39d01b65fc}">
+        <p14:section name="연습" id="{1257a088-ed56-a374-7ef1-bb0fd9e1c74b}">
           <p14:sldIdLst/>
         </p14:section>
-        <p14:section name="확인" id="{32fdc1f6-d45a-997e-0d95-df361f7b52e0}">
+        <p14:section name="확인" id="{c31914e5-be6b-ea64-02c0-f5d295853aab}">
           <p14:sldIdLst>
             <p14:sldId id="265"/>
             <p14:sldId id="266"/>
             <p14:sldId id="267"/>
           </p14:sldIdLst>
         </p14:section>
-        <p14:section name="정리" id="{c29a84ce-19fb-2923-137b-be74b3845aab}">
+        <p14:section name="정리" id="{6f65ad7b-a1ad-3c81-b675-c23b521e9130}">
           <p14:sldIdLst>
             <p14:sldId id="268"/>
           </p14:sldIdLst>
         </p14:section>
-        <p14:section name="보충" id="{af928b34-cd2e-80aa-aaf3-4c08b34f69db}">
+        <p14:section name="보충" id="{5e1e48fd-b818-2c6a-ad77-0c26ba231d14}">
           <p14:sldIdLst>
             <p14:sldId id="269"/>
           </p14:sldIdLst>

--- a/dist/초1/수학/수와연산/초1_수학_수와연산_09_10이되는더하기.pptx
+++ b/dist/초1/수학/수와연산/초1_수학_수와연산_09_10이되는더하기.pptx
@@ -120,13 +120,13 @@
   <p:extLst>
     <p:ext uri="{521415D9-36F7-43E2-AB2F-B90AF26B5E84}">
       <p14:sectionLst xmlns:p14="http://schemas.microsoft.com/office/powerpoint/2010/main">
-        <p14:section name="도입" id="{2761c9e4-2c59-cf1a-38f5-bfadaa0ee4be}">
+        <p14:section name="도입" id="{b45b615b-2304-bc8e-554a-4dfc797b78bb}">
           <p14:sldIdLst>
             <p14:sldId id="256"/>
             <p14:sldId id="257"/>
           </p14:sldIdLst>
         </p14:section>
-        <p14:section name="개념" id="{8c85f333-5d9a-4329-4b06-1c08d0c2e983}">
+        <p14:section name="개념" id="{45b315f2-44bf-5690-647e-5afcde385dd2}">
           <p14:sldIdLst>
             <p14:sldId id="258"/>
             <p14:sldId id="259"/>
@@ -134,32 +134,32 @@
             <p14:sldId id="262"/>
           </p14:sldIdLst>
         </p14:section>
-        <p14:section name="연습" id="{9c94ba77-4613-f226-d6d2-e052382352eb}">
+        <p14:section name="연습" id="{bb6a4804-3b44-8214-61d7-fe7a9b5d79fc}">
           <p14:sldIdLst>
             <p14:sldId id="260"/>
             <p14:sldId id="263"/>
             <p14:sldId id="264"/>
           </p14:sldIdLst>
         </p14:section>
-        <p14:section name="개념" id="{93b31e87-ecba-516c-a30f-74ea19be79ee}">
+        <p14:section name="개념" id="{98477a3b-f4eb-f6c4-eacd-767df165697c}">
           <p14:sldIdLst/>
         </p14:section>
-        <p14:section name="연습" id="{1257a088-ed56-a374-7ef1-bb0fd9e1c74b}">
+        <p14:section name="연습" id="{3b05318d-fc63-a216-4cf3-69acba45e909}">
           <p14:sldIdLst/>
         </p14:section>
-        <p14:section name="확인" id="{c31914e5-be6b-ea64-02c0-f5d295853aab}">
+        <p14:section name="확인" id="{7cb61341-2f0b-2bb8-720f-be614f8f2687}">
           <p14:sldIdLst>
             <p14:sldId id="265"/>
             <p14:sldId id="266"/>
             <p14:sldId id="267"/>
           </p14:sldIdLst>
         </p14:section>
-        <p14:section name="정리" id="{6f65ad7b-a1ad-3c81-b675-c23b521e9130}">
+        <p14:section name="정리" id="{ab797cea-24cc-9b9b-f364-5482edecc5c4}">
           <p14:sldIdLst>
             <p14:sldId id="268"/>
           </p14:sldIdLst>
         </p14:section>
-        <p14:section name="보충" id="{5e1e48fd-b818-2c6a-ad77-0c26ba231d14}">
+        <p14:section name="보충" id="{edfd05b6-79f6-2d60-3c51-aedd55420de5}">
           <p14:sldIdLst>
             <p14:sldId id="269"/>
           </p14:sldIdLst>
@@ -6624,7 +6624,7 @@
         </p:nvSpPr>
         <p:spPr>
           <a:xfrm>
-            <a:off x="548640" y="5157216"/>
+            <a:off x="548640" y="5180076"/>
             <a:ext cx="566928" cy="566928"/>
           </a:xfrm>
           <a:prstGeom prst="roundRect">
@@ -6671,8 +6671,8 @@
         </p:nvSpPr>
         <p:spPr>
           <a:xfrm flipH="1" flipV="1">
-            <a:off x="2593848" y="5318760"/>
-            <a:ext cx="853440" cy="243840"/>
+            <a:off x="3207258" y="5337810"/>
+            <a:ext cx="880110" cy="251460"/>
           </a:xfrm>
           <a:prstGeom prst="line">
             <a:avLst/>
@@ -6694,8 +6694,8 @@
         </p:nvSpPr>
         <p:spPr>
           <a:xfrm flipV="1">
-            <a:off x="3447288" y="5318760"/>
-            <a:ext cx="853440" cy="243840"/>
+            <a:off x="4087368" y="5337810"/>
+            <a:ext cx="880110" cy="251460"/>
           </a:xfrm>
           <a:prstGeom prst="line">
             <a:avLst/>
@@ -6717,8 +6717,8 @@
         </p:nvSpPr>
         <p:spPr>
           <a:xfrm>
-            <a:off x="3142488" y="5562600"/>
-            <a:ext cx="609600" cy="609600"/>
+            <a:off x="3773043" y="5589270"/>
+            <a:ext cx="628650" cy="628650"/>
           </a:xfrm>
           <a:prstGeom prst="ellipse">
             <a:avLst/>
@@ -6740,7 +6740,7 @@
             <a:pPr eaLnBrk="0" algn="ctr" indent="0" marL="0">
               <a:buNone/>
             </a:pPr>
-            <a:endParaRPr lang="ko-KR" sz="2400" dirty="0"/>
+            <a:endParaRPr lang="ko-KR" sz="2500" dirty="0"/>
           </a:p>
         </p:txBody>
       </p:sp>
@@ -6752,8 +6752,8 @@
         </p:nvSpPr>
         <p:spPr>
           <a:xfrm>
-            <a:off x="2289048" y="4709160"/>
-            <a:ext cx="609600" cy="609600"/>
+            <a:off x="2892933" y="4709160"/>
+            <a:ext cx="628650" cy="628650"/>
           </a:xfrm>
           <a:prstGeom prst="ellipse">
             <a:avLst/>
@@ -6776,7 +6776,7 @@
               <a:buNone/>
             </a:pPr>
             <a:r>
-              <a:rPr lang="ko-KR" altLang="en-US" sz="2400" b="1" dirty="0">
+              <a:rPr lang="ko-KR" altLang="en-US" sz="2500" b="1" dirty="0">
                 <a:solidFill>
                   <a:srgbClr val="1F2937"/>
                 </a:solidFill>
@@ -6786,7 +6786,7 @@
               </a:rPr>
               <a:t>10</a:t>
             </a:r>
-            <a:endParaRPr lang="ko-KR" sz="2400" dirty="0"/>
+            <a:endParaRPr lang="ko-KR" sz="2500" dirty="0"/>
           </a:p>
         </p:txBody>
       </p:sp>
@@ -6798,8 +6798,8 @@
         </p:nvSpPr>
         <p:spPr>
           <a:xfrm>
-            <a:off x="3995928" y="4709160"/>
-            <a:ext cx="609600" cy="609600"/>
+            <a:off x="4653153" y="4709160"/>
+            <a:ext cx="628650" cy="628650"/>
           </a:xfrm>
           <a:prstGeom prst="ellipse">
             <a:avLst/>
@@ -6822,7 +6822,7 @@
               <a:buNone/>
             </a:pPr>
             <a:r>
-              <a:rPr lang="ko-KR" altLang="en-US" sz="2400" b="1" dirty="0">
+              <a:rPr lang="ko-KR" altLang="en-US" sz="2500" b="1" dirty="0">
                 <a:solidFill>
                   <a:srgbClr val="1F2937"/>
                 </a:solidFill>
@@ -6832,7 +6832,7 @@
               </a:rPr>
               <a:t>6</a:t>
             </a:r>
-            <a:endParaRPr lang="ko-KR" sz="2400" dirty="0"/>
+            <a:endParaRPr lang="ko-KR" sz="2500" dirty="0"/>
           </a:p>
         </p:txBody>
       </p:sp>

--- a/dist/초1/수학/수와연산/초1_수학_수와연산_09_10이되는더하기.pptx
+++ b/dist/초1/수학/수와연산/초1_수학_수와연산_09_10이되는더하기.pptx
@@ -120,13 +120,13 @@
   <p:extLst>
     <p:ext uri="{521415D9-36F7-43E2-AB2F-B90AF26B5E84}">
       <p14:sectionLst xmlns:p14="http://schemas.microsoft.com/office/powerpoint/2010/main">
-        <p14:section name="도입" id="{b45b615b-2304-bc8e-554a-4dfc797b78bb}">
+        <p14:section name="도입" id="{3f74001f-b231-47f9-817b-2b393269764c}">
           <p14:sldIdLst>
             <p14:sldId id="256"/>
             <p14:sldId id="257"/>
           </p14:sldIdLst>
         </p14:section>
-        <p14:section name="개념" id="{45b315f2-44bf-5690-647e-5afcde385dd2}">
+        <p14:section name="개념" id="{2cb0ebad-ef26-78b5-cf3e-cacf39f8ee0e}">
           <p14:sldIdLst>
             <p14:sldId id="258"/>
             <p14:sldId id="259"/>
@@ -134,32 +134,32 @@
             <p14:sldId id="262"/>
           </p14:sldIdLst>
         </p14:section>
-        <p14:section name="연습" id="{bb6a4804-3b44-8214-61d7-fe7a9b5d79fc}">
+        <p14:section name="연습" id="{8ea4d001-ea7d-3ee4-5fb5-14f8b2d6f662}">
           <p14:sldIdLst>
             <p14:sldId id="260"/>
             <p14:sldId id="263"/>
             <p14:sldId id="264"/>
           </p14:sldIdLst>
         </p14:section>
-        <p14:section name="개념" id="{98477a3b-f4eb-f6c4-eacd-767df165697c}">
+        <p14:section name="개념" id="{eb233f6c-631b-5be4-a7ca-397063ea0eca}">
           <p14:sldIdLst/>
         </p14:section>
-        <p14:section name="연습" id="{3b05318d-fc63-a216-4cf3-69acba45e909}">
+        <p14:section name="연습" id="{4e815d41-e3da-3491-3518-cfa50d0463e3}">
           <p14:sldIdLst/>
         </p14:section>
-        <p14:section name="확인" id="{7cb61341-2f0b-2bb8-720f-be614f8f2687}">
+        <p14:section name="확인" id="{c81fbaf0-ee45-9f35-9fdd-027032e48492}">
           <p14:sldIdLst>
             <p14:sldId id="265"/>
             <p14:sldId id="266"/>
             <p14:sldId id="267"/>
           </p14:sldIdLst>
         </p14:section>
-        <p14:section name="정리" id="{ab797cea-24cc-9b9b-f364-5482edecc5c4}">
+        <p14:section name="정리" id="{fc084017-1486-babf-2d2e-57d766ae0417}">
           <p14:sldIdLst>
             <p14:sldId id="268"/>
           </p14:sldIdLst>
         </p14:section>
-        <p14:section name="보충" id="{edfd05b6-79f6-2d60-3c51-aedd55420de5}">
+        <p14:section name="보충" id="{1394b9a0-0f27-37e8-63bd-743d345f745a}">
           <p14:sldIdLst>
             <p14:sldId id="269"/>
           </p14:sldIdLst>
@@ -7885,7 +7885,7 @@
           </p:nvPr>
         </p:nvGraphicFramePr>
         <p:xfrm>
-          <a:off x="836676" y="2915920"/>
+          <a:off x="836676" y="2936240"/>
           <a:ext cx="10515600" cy="914400"/>
         </p:xfrm>
         <a:graphic>
@@ -7904,7 +7904,7 @@
                 <a:gridCol w="946404"/>
                 <a:gridCol w="946404"/>
               </a:tblGrid>
-              <a:tr h="650240">
+              <a:tr h="629920">
                 <a:tc>
                   <a:txBody>
                     <a:bodyPr/>
@@ -8586,7 +8586,7 @@
                   </a:tcPr>
                 </a:tc>
               </a:tr>
-              <a:tr h="650240">
+              <a:tr h="629920">
                 <a:tc>
                   <a:txBody>
                     <a:bodyPr/>
